--- a/NETSENTINEL v1.pptx
+++ b/NETSENTINEL v1.pptx
@@ -3779,7 +3779,7 @@
                   <a:srgbClr val="607890"/>
                 </a:solidFill>
               </a:rPr>
-              <a:t>Rapport d’analyse de sécurité — 16 mars 2025</a:t>
+              <a:t>Rapport d’analyse de sécurité — 15 avril 2026</a:t>
             </a:r>
           </a:p>
         </p:txBody>
@@ -7826,11 +7826,12 @@
 </file>
 
 <file path=customXml/item1.xml><?xml version="1.0" encoding="utf-8"?>
-<p:properties xmlns:p="http://schemas.microsoft.com/office/2006/metadata/properties" xmlns:xsi="http://www.w3.org/2001/XMLSchema-instance" xmlns:pc="http://schemas.microsoft.com/office/infopath/2007/PartnerControls">
-  <documentManagement>
-    <_activity xmlns="1dd4e0b8-b4d5-463a-82ab-ceea7df4da00" xsi:nil="true"/>
-  </documentManagement>
-</p:properties>
+<?mso-contentType ?>
+<FormTemplates xmlns="http://schemas.microsoft.com/sharepoint/v3/contenttype/forms">
+  <Display>DocumentLibraryForm</Display>
+  <Edit>DocumentLibraryForm</Edit>
+  <New>DocumentLibraryForm</New>
+</FormTemplates>
 </file>
 
 <file path=customXml/item2.xml><?xml version="1.0" encoding="utf-8"?>
@@ -8010,26 +8011,17 @@
 </file>
 
 <file path=customXml/item3.xml><?xml version="1.0" encoding="utf-8"?>
-<?mso-contentType ?>
-<FormTemplates xmlns="http://schemas.microsoft.com/sharepoint/v3/contenttype/forms">
-  <Display>DocumentLibraryForm</Display>
-  <Edit>DocumentLibraryForm</Edit>
-  <New>DocumentLibraryForm</New>
-</FormTemplates>
+<p:properties xmlns:p="http://schemas.microsoft.com/office/2006/metadata/properties" xmlns:xsi="http://www.w3.org/2001/XMLSchema-instance" xmlns:pc="http://schemas.microsoft.com/office/infopath/2007/PartnerControls">
+  <documentManagement>
+    <_activity xmlns="1dd4e0b8-b4d5-463a-82ab-ceea7df4da00" xsi:nil="true"/>
+  </documentManagement>
+</p:properties>
 </file>
 
 <file path=customXml/itemProps1.xml><?xml version="1.0" encoding="utf-8"?>
-<ds:datastoreItem xmlns:ds="http://schemas.openxmlformats.org/officeDocument/2006/customXml" ds:itemID="{EDC72CB6-A109-42A9-84A9-9A66A48CB0B1}">
+<ds:datastoreItem xmlns:ds="http://schemas.openxmlformats.org/officeDocument/2006/customXml" ds:itemID="{40577C31-3744-4584-98DC-BE736172C98D}">
   <ds:schemaRefs>
-    <ds:schemaRef ds:uri="http://schemas.microsoft.com/office/infopath/2007/PartnerControls"/>
-    <ds:schemaRef ds:uri="http://purl.org/dc/elements/1.1/"/>
-    <ds:schemaRef ds:uri="http://www.w3.org/XML/1998/namespace"/>
-    <ds:schemaRef ds:uri="http://purl.org/dc/dcmitype/"/>
-    <ds:schemaRef ds:uri="http://schemas.microsoft.com/office/2006/documentManagement/types"/>
-    <ds:schemaRef ds:uri="http://purl.org/dc/terms/"/>
-    <ds:schemaRef ds:uri="http://schemas.openxmlformats.org/package/2006/metadata/core-properties"/>
-    <ds:schemaRef ds:uri="1dd4e0b8-b4d5-463a-82ab-ceea7df4da00"/>
-    <ds:schemaRef ds:uri="http://schemas.microsoft.com/office/2006/metadata/properties"/>
+    <ds:schemaRef ds:uri="http://schemas.microsoft.com/sharepoint/v3/contenttype/forms"/>
   </ds:schemaRefs>
 </ds:datastoreItem>
 </file>
@@ -8053,9 +8045,17 @@
 </file>
 
 <file path=customXml/itemProps3.xml><?xml version="1.0" encoding="utf-8"?>
-<ds:datastoreItem xmlns:ds="http://schemas.openxmlformats.org/officeDocument/2006/customXml" ds:itemID="{40577C31-3744-4584-98DC-BE736172C98D}">
+<ds:datastoreItem xmlns:ds="http://schemas.openxmlformats.org/officeDocument/2006/customXml" ds:itemID="{EDC72CB6-A109-42A9-84A9-9A66A48CB0B1}">
   <ds:schemaRefs>
-    <ds:schemaRef ds:uri="http://schemas.microsoft.com/sharepoint/v3/contenttype/forms"/>
+    <ds:schemaRef ds:uri="http://schemas.microsoft.com/office/infopath/2007/PartnerControls"/>
+    <ds:schemaRef ds:uri="http://purl.org/dc/elements/1.1/"/>
+    <ds:schemaRef ds:uri="http://www.w3.org/XML/1998/namespace"/>
+    <ds:schemaRef ds:uri="http://purl.org/dc/dcmitype/"/>
+    <ds:schemaRef ds:uri="http://schemas.microsoft.com/office/2006/documentManagement/types"/>
+    <ds:schemaRef ds:uri="http://purl.org/dc/terms/"/>
+    <ds:schemaRef ds:uri="http://schemas.openxmlformats.org/package/2006/metadata/core-properties"/>
+    <ds:schemaRef ds:uri="1dd4e0b8-b4d5-463a-82ab-ceea7df4da00"/>
+    <ds:schemaRef ds:uri="http://schemas.microsoft.com/office/2006/metadata/properties"/>
   </ds:schemaRefs>
 </ds:datastoreItem>
 </file>